--- a/AI学习成果分享.pptx
+++ b/AI学习成果分享.pptx
@@ -511,7 +511,7 @@
           <a:lstStyle/>
           <a:p>
             <a:r>
-              <a:t>大家好，我是做电话销售的。这次分享的不是高大上的 AI 理论，而是我用 AI 实实在在解决了三个每天都要干的麻烦事。全程只用一个工具——Cursor。</a:t>
+              <a:t>大家好，我是做电话销售的。这次分享我做的一个工具——通话复盘助手。它帮我把每通电话的复盘时间从二十分钟缩短到两分钟。全程用 Cursor 开发，部署成了一个网站，打开就能用。</a:t>
             </a:r>
           </a:p>
         </p:txBody>
@@ -581,7 +581,7 @@
           <a:lstStyle/>
           <a:p>
             <a:r>
-              <a:t>这套东西我整理成了模板，复制就能用，不需要会编程。如果只想试一个，建议从通话复盘开始。需要的同事会后找我。谢谢大家！</a:t>
+              <a:t>总结：我用 Cursor 做了通话复盘助手，已经部署上线。接下来现场演示。谢谢大家！（把最后一页的链接换成你自己的网址）</a:t>
             </a:r>
           </a:p>
         </p:txBody>
@@ -651,7 +651,7 @@
           <a:lstStyle/>
           <a:p>
             <a:r>
-              <a:t>我们真正赚钱的动作是打电话，但很多时间花在了打电话之外：打完要复盘，打之前要准备话术，客户一问细节还得去翻知识库。这些事不做不行，做了又很耗时间。</a:t>
+              <a:t>我们赚钱靠打电话，但复盘不做又不行。手动复盘又慢又容易漏，好的话术也沉淀不下来。</a:t>
             </a:r>
           </a:p>
         </p:txBody>
@@ -721,7 +721,7 @@
           <a:lstStyle/>
           <a:p>
             <a:r>
-              <a:t>我盘了一下手上的资源：CRM 销售记录、知识库网站、通话录音。这三样分别对应销售最关键的三个问题，我把它们和 AI 结合，做出了三个小工具。</a:t>
+              <a:t>我做了一个通话复盘助手，上传脱敏后的转写文件，几秒出结果。它从十个维度帮你复盘，而且待改进不只是说问题，还给你具体改法。</a:t>
             </a:r>
           </a:p>
         </p:txBody>
@@ -791,7 +791,7 @@
           <a:lstStyle/>
           <a:p>
             <a:r>
-              <a:t>我主要学了三件事：把 Cursor 用起来，哪怕不懂代码也能让它帮我做工具；搞懂了 RAG，就是让 AI 先查我们自己的资料再回答；学会了怎么把问题问清楚。</a:t>
+              <a:t>整个过程我用 Cursor 完成。不懂代码也能做，关键是把需求想清楚：复盘要分析什么、输出什么。</a:t>
             </a:r>
           </a:p>
         </p:txBody>
@@ -861,7 +861,7 @@
           <a:lstStyle/>
           <a:p>
             <a:r>
-              <a:t>第一个也是我最想给大家看的——通话复盘助手。现场打开 Cursor 运行 call_review.py，把一段脱敏转写丢进去，它马上整理出客户需求、异议、我哪里做得不好、漏了哪些动作，甚至挑出违规话术。以前复盘一通要二十分钟，现在两分钟。</a:t>
+              <a:t>现场演示第一步：打开网站，上传一份脱敏的转写文件。支持 Excel，就是你们 CRM 导出的那种格式。</a:t>
             </a:r>
           </a:p>
         </p:txBody>
@@ -931,7 +931,7 @@
           <a:lstStyle/>
           <a:p>
             <a:r>
-              <a:t>第二个，话术生成器。打电话前把客户在 CRM 里的情况告诉 AI，它就生成一整套话术：开场怎么说、三个卖点怎么讲、客户挑刺怎么接、最后该约什么。相当于每次打电话前都有个老销售帮我对稿。</a:t>
+              <a:t>点分析后几秒出结果。有评分、客户画像、异议分类、待改进（带改法）、合规检查、金句。</a:t>
             </a:r>
           </a:p>
         </p:txBody>
@@ -1001,7 +1001,7 @@
           <a:lstStyle/>
           <a:p>
             <a:r>
-              <a:t>第三个解决知识库难搜的问题。把常用文档脱敏后放进文件夹，用大白话问，它基于我们自己的资料回答，还告诉我出处。关键是只答资料里有的，查不到就老实说建议核实，不会瞎编坑我。</a:t>
+              <a:t>这是工具真实输出的节选。它不只是列问题，还会引用原话、分类异议、给出具体改法。比如自动揪出「保证三天上线」这种过度承诺，并告诉你该怎么改。</a:t>
             </a:r>
           </a:p>
         </p:txBody>
@@ -1071,7 +1071,7 @@
           <a:lstStyle/>
           <a:p>
             <a:r>
-              <a:t>算笔账：这三件事加起来，我每天大概能省出一两个小时，拿去多打几通有效电话。而且复盘做细了话术也在变好，这是复利。</a:t>
+              <a:t>算笔账：以前复盘一通二十分钟，现在两分钟。而且机器不会漏掉过度承诺这种坑。</a:t>
             </a:r>
           </a:p>
         </p:txBody>
@@ -1141,7 +1141,7 @@
           <a:lstStyle/>
           <a:p>
             <a:r>
-              <a:t>特别强调：这些数据涉及客户隐私和公司机密，我所有演示都是脱敏的，真实数据只在公司允许的环境里用。用 AI 提效的前提是安全合规，这条红线不能碰。</a:t>
+              <a:t>强调一点：数据安全。所有演示都是脱敏的，公开链接不要传真实客户数据。</a:t>
             </a:r>
           </a:p>
         </p:txBody>
@@ -4149,14 +4149,57 @@
       <p:grpSpPr/>
       <p:sp>
         <p:nvSpPr>
-          <p:cNvPr id="2" name="TextBox 1"/>
+          <p:cNvPr id="2" name="Rectangle 1"/>
+          <p:cNvSpPr/>
+          <p:nvPr/>
+        </p:nvSpPr>
+        <p:spPr>
+          <a:xfrm>
+            <a:off x="0" y="1828800"/>
+            <a:ext cx="12191695" cy="3200400"/>
+          </a:xfrm>
+          <a:prstGeom prst="rect">
+            <a:avLst/>
+          </a:prstGeom>
+          <a:solidFill>
+            <a:srgbClr val="1F4E79"/>
+          </a:solidFill>
+          <a:ln>
+            <a:noFill/>
+          </a:ln>
+        </p:spPr>
+        <p:style>
+          <a:lnRef idx="1">
+            <a:schemeClr val="accent1"/>
+          </a:lnRef>
+          <a:fillRef idx="3">
+            <a:schemeClr val="accent1"/>
+          </a:fillRef>
+          <a:effectRef idx="2">
+            <a:schemeClr val="accent1"/>
+          </a:effectRef>
+          <a:fontRef idx="minor">
+            <a:schemeClr val="lt1"/>
+          </a:fontRef>
+        </p:style>
+        <p:txBody>
+          <a:bodyPr rtlCol="0" anchor="ctr"/>
+          <a:lstStyle/>
+          <a:p>
+            <a:pPr algn="ctr"/>
+          </a:p>
+        </p:txBody>
+      </p:sp>
+      <p:sp>
+        <p:nvSpPr>
+          <p:cNvPr id="3" name="TextBox 2"/>
           <p:cNvSpPr txBox="1"/>
           <p:nvPr/>
         </p:nvSpPr>
         <p:spPr>
           <a:xfrm>
-            <a:off x="731520" y="2011680"/>
-            <a:ext cx="10728655" cy="1463040"/>
+            <a:off x="731520" y="2103120"/>
+            <a:ext cx="10728655" cy="1097280"/>
           </a:xfrm>
           <a:prstGeom prst="rect">
             <a:avLst/>
@@ -4164,7 +4207,7 @@
           <a:noFill/>
         </p:spPr>
         <p:txBody>
-          <a:bodyPr wrap="square">
+          <a:bodyPr wrap="none">
             <a:spAutoFit/>
           </a:bodyPr>
           <a:lstStyle/>
@@ -4173,25 +4216,25 @@
             <a:r>
               <a:rPr sz="4000" b="1">
                 <a:solidFill>
-                  <a:srgbClr val="1F4E79"/>
+                  <a:srgbClr val="FFFFFF"/>
                 </a:solidFill>
                 <a:latin typeface="Microsoft YaHei"/>
               </a:rPr>
-              <a:t>从“凭经验”到“靠工具”</a:t>
-            </a:r>
-          </a:p>
-        </p:txBody>
-      </p:sp>
-      <p:sp>
-        <p:nvSpPr>
-          <p:cNvPr id="3" name="TextBox 2"/>
+              <a:t>AI 学习成果分享</a:t>
+            </a:r>
+          </a:p>
+        </p:txBody>
+      </p:sp>
+      <p:sp>
+        <p:nvSpPr>
+          <p:cNvPr id="4" name="TextBox 3"/>
           <p:cNvSpPr txBox="1"/>
           <p:nvPr/>
         </p:nvSpPr>
         <p:spPr>
           <a:xfrm>
-            <a:off x="731520" y="3474720"/>
-            <a:ext cx="10728655" cy="1280160"/>
+            <a:off x="731520" y="3200400"/>
+            <a:ext cx="10728655" cy="914400"/>
           </a:xfrm>
           <a:prstGeom prst="rect">
             <a:avLst/>
@@ -4199,28 +4242,40 @@
           <a:noFill/>
         </p:spPr>
         <p:txBody>
-          <a:bodyPr wrap="square">
+          <a:bodyPr wrap="none">
             <a:spAutoFit/>
           </a:bodyPr>
           <a:lstStyle/>
           <a:p>
             <a:pPr algn="ctr"/>
             <a:r>
-              <a:rPr sz="2000">
+              <a:rPr sz="2200" b="1">
                 <a:solidFill>
-                  <a:srgbClr val="555F6B"/>
+                  <a:srgbClr val="FFFFFF"/>
                 </a:solidFill>
                 <a:latin typeface="Microsoft YaHei"/>
               </a:rPr>
-              <a:t>我用 Cursor + AI 提升电话销售效率的实践</a:t>
+              <a:t>通话复盘助手</a:t>
             </a:r>
           </a:p>
           <a:p>
             <a:pPr algn="ctr"/>
             <a:r>
-              <a:rPr sz="2000">
+              <a:rPr sz="1600" b="0">
                 <a:solidFill>
-                  <a:srgbClr val="555F6B"/>
+                  <a:srgbClr val="E8F1FB"/>
+                </a:solidFill>
+                <a:latin typeface="Microsoft YaHei"/>
+              </a:rPr>
+              <a:t>—— 用 Cursor 把复盘从 20 分钟缩短到 2 分钟</a:t>
+            </a:r>
+          </a:p>
+          <a:p>
+            <a:pPr algn="ctr"/>
+            <a:r>
+              <a:rPr sz="1600" b="0">
+                <a:solidFill>
+                  <a:srgbClr val="E8F1FB"/>
                 </a:solidFill>
                 <a:latin typeface="Microsoft YaHei"/>
               </a:rPr>
@@ -4255,8 +4310,8 @@
         </p:nvSpPr>
         <p:spPr>
           <a:xfrm>
-            <a:off x="548640" y="365760"/>
-            <a:ext cx="11094415" cy="914400"/>
+            <a:off x="548640" y="320040"/>
+            <a:ext cx="11094415" cy="822960"/>
           </a:xfrm>
           <a:prstGeom prst="rect">
             <a:avLst/>
@@ -4264,20 +4319,19 @@
           <a:noFill/>
         </p:spPr>
         <p:txBody>
-          <a:bodyPr wrap="square">
+          <a:bodyPr wrap="none">
             <a:spAutoFit/>
           </a:bodyPr>
           <a:lstStyle/>
           <a:p>
-            <a:pPr algn="l"/>
-            <a:r>
-              <a:rPr sz="3000" b="1">
+            <a:r>
+              <a:rPr sz="2800" b="1">
                 <a:solidFill>
                   <a:srgbClr val="1F4E79"/>
                 </a:solidFill>
                 <a:latin typeface="Microsoft YaHei"/>
               </a:rPr>
-              <a:t>怎么复制给团队</a:t>
+              <a:t>总结 &amp; 现场演示</a:t>
             </a:r>
           </a:p>
         </p:txBody>
@@ -4290,8 +4344,8 @@
         </p:nvSpPr>
         <p:spPr>
           <a:xfrm>
-            <a:off x="594360" y="1234440"/>
-            <a:ext cx="2011680" cy="38100"/>
+            <a:off x="594360" y="1097280"/>
+            <a:ext cx="1828800" cy="38100"/>
           </a:xfrm>
           <a:prstGeom prst="rect">
             <a:avLst/>
@@ -4333,8 +4387,8 @@
         </p:nvSpPr>
         <p:spPr>
           <a:xfrm>
-            <a:off x="731520" y="1554480"/>
-            <a:ext cx="10728655" cy="4389120"/>
+            <a:off x="731520" y="1371600"/>
+            <a:ext cx="10728655" cy="5029200"/>
           </a:xfrm>
           <a:prstGeom prst="rect">
             <a:avLst/>
@@ -4349,7 +4403,7 @@
           <a:p>
             <a:pPr>
               <a:spcAft>
-                <a:spcPts val="1000"/>
+                <a:spcPts val="800"/>
               </a:spcAft>
             </a:pPr>
             <a:r>
@@ -4359,13 +4413,13 @@
                 </a:solidFill>
                 <a:latin typeface="Microsoft YaHei"/>
               </a:rPr>
-              <a:t>•  工具、Prompt 模板都整理好了，复制即用</a:t>
+              <a:t>• 我做了一个工具：通话复盘助手</a:t>
             </a:r>
           </a:p>
           <a:p>
             <a:pPr>
               <a:spcAft>
-                <a:spcPts val="1000"/>
+                <a:spcPts val="800"/>
               </a:spcAft>
             </a:pPr>
             <a:r>
@@ -4375,13 +4429,13 @@
                 </a:solidFill>
                 <a:latin typeface="Microsoft YaHei"/>
               </a:rPr>
-              <a:t>•  不需要会编程，会用 Cursor 就行</a:t>
+              <a:t>• 网址：[填入你的 Streamlit 链接]</a:t>
             </a:r>
           </a:p>
           <a:p>
             <a:pPr>
               <a:spcAft>
-                <a:spcPts val="1000"/>
+                <a:spcPts val="800"/>
               </a:spcAft>
             </a:pPr>
             <a:r>
@@ -4391,7 +4445,23 @@
                 </a:solidFill>
                 <a:latin typeface="Microsoft YaHei"/>
               </a:rPr>
-              <a:t>•  建议先从“通话复盘”开始，见效最快</a:t>
+              <a:t>• 接下来现场演示：上传一份文件，看分析结果</a:t>
+            </a:r>
+          </a:p>
+          <a:p>
+            <a:pPr>
+              <a:spcAft>
+                <a:spcPts val="800"/>
+              </a:spcAft>
+            </a:pPr>
+            <a:r>
+              <a:rPr sz="2200" b="1">
+                <a:solidFill>
+                  <a:srgbClr val="22292F"/>
+                </a:solidFill>
+                <a:latin typeface="Microsoft YaHei"/>
+              </a:rPr>
+              <a:t>• 欢迎大家扫码/收藏链接，会后试用</a:t>
             </a:r>
           </a:p>
         </p:txBody>
@@ -4422,8 +4492,8 @@
         </p:nvSpPr>
         <p:spPr>
           <a:xfrm>
-            <a:off x="548640" y="365760"/>
-            <a:ext cx="11094415" cy="914400"/>
+            <a:off x="548640" y="320040"/>
+            <a:ext cx="11094415" cy="822960"/>
           </a:xfrm>
           <a:prstGeom prst="rect">
             <a:avLst/>
@@ -4431,20 +4501,19 @@
           <a:noFill/>
         </p:spPr>
         <p:txBody>
-          <a:bodyPr wrap="square">
+          <a:bodyPr wrap="none">
             <a:spAutoFit/>
           </a:bodyPr>
           <a:lstStyle/>
           <a:p>
-            <a:pPr algn="l"/>
-            <a:r>
-              <a:rPr sz="3000" b="1">
+            <a:r>
+              <a:rPr sz="2800" b="1">
                 <a:solidFill>
                   <a:srgbClr val="1F4E79"/>
                 </a:solidFill>
                 <a:latin typeface="Microsoft YaHei"/>
               </a:rPr>
-              <a:t>痛点：电话销售的“隐形时间黑洞”</a:t>
+              <a:t>痛点：复盘是销售的「隐形时间黑洞」</a:t>
             </a:r>
           </a:p>
         </p:txBody>
@@ -4457,8 +4526,8 @@
         </p:nvSpPr>
         <p:spPr>
           <a:xfrm>
-            <a:off x="594360" y="1234440"/>
-            <a:ext cx="2011680" cy="38100"/>
+            <a:off x="594360" y="1097280"/>
+            <a:ext cx="1828800" cy="38100"/>
           </a:xfrm>
           <a:prstGeom prst="rect">
             <a:avLst/>
@@ -4500,8 +4569,8 @@
         </p:nvSpPr>
         <p:spPr>
           <a:xfrm>
-            <a:off x="731520" y="1554480"/>
-            <a:ext cx="10728655" cy="4389120"/>
+            <a:off x="731520" y="1371600"/>
+            <a:ext cx="10728655" cy="5029200"/>
           </a:xfrm>
           <a:prstGeom prst="rect">
             <a:avLst/>
@@ -4516,7 +4585,7 @@
           <a:p>
             <a:pPr>
               <a:spcAft>
-                <a:spcPts val="1000"/>
+                <a:spcPts val="800"/>
               </a:spcAft>
             </a:pPr>
             <a:r>
@@ -4526,13 +4595,13 @@
                 </a:solidFill>
                 <a:latin typeface="Microsoft YaHei"/>
               </a:rPr>
-              <a:t>•  打完电话要手动复盘、记笔记</a:t>
+              <a:t>• 打完一通电话，手动复盘、记笔记要 15-20 分钟</a:t>
             </a:r>
           </a:p>
           <a:p>
             <a:pPr>
               <a:spcAft>
-                <a:spcPts val="1000"/>
+                <a:spcPts val="800"/>
               </a:spcAft>
             </a:pPr>
             <a:r>
@@ -4542,13 +4611,13 @@
                 </a:solidFill>
                 <a:latin typeface="Microsoft YaHei"/>
               </a:rPr>
-              <a:t>•  每个客户打电话前要翻半天资料、想话术</a:t>
+              <a:t>• 容易遗漏：客户异议没接住、过度承诺没发现</a:t>
             </a:r>
           </a:p>
           <a:p>
             <a:pPr>
               <a:spcAft>
-                <a:spcPts val="1000"/>
+                <a:spcPts val="800"/>
               </a:spcAft>
             </a:pPr>
             <a:r>
@@ -4558,7 +4627,23 @@
                 </a:solidFill>
                 <a:latin typeface="Microsoft YaHei"/>
               </a:rPr>
-              <a:t>•  客户问产品细节，知识库要连 VPN、搜半天</a:t>
+              <a:t>• 经验难沉淀：好的话术没人帮你提炼</a:t>
+            </a:r>
+          </a:p>
+          <a:p>
+            <a:pPr>
+              <a:spcAft>
+                <a:spcPts val="800"/>
+              </a:spcAft>
+            </a:pPr>
+            <a:r>
+              <a:rPr sz="2200" b="1">
+                <a:solidFill>
+                  <a:srgbClr val="22292F"/>
+                </a:solidFill>
+                <a:latin typeface="Microsoft YaHei"/>
+              </a:rPr>
+              <a:t>• 一天打 20 通电话，光复盘就占掉大半天</a:t>
             </a:r>
           </a:p>
         </p:txBody>
@@ -4589,8 +4674,8 @@
         </p:nvSpPr>
         <p:spPr>
           <a:xfrm>
-            <a:off x="548640" y="365760"/>
-            <a:ext cx="11094415" cy="914400"/>
+            <a:off x="548640" y="320040"/>
+            <a:ext cx="11094415" cy="822960"/>
           </a:xfrm>
           <a:prstGeom prst="rect">
             <a:avLst/>
@@ -4598,20 +4683,19 @@
           <a:noFill/>
         </p:spPr>
         <p:txBody>
-          <a:bodyPr wrap="square">
+          <a:bodyPr wrap="none">
             <a:spAutoFit/>
           </a:bodyPr>
           <a:lstStyle/>
           <a:p>
-            <a:pPr algn="l"/>
-            <a:r>
-              <a:rPr sz="3000" b="1">
+            <a:r>
+              <a:rPr sz="2800" b="1">
                 <a:solidFill>
                   <a:srgbClr val="1F4E79"/>
                 </a:solidFill>
                 <a:latin typeface="Microsoft YaHei"/>
               </a:rPr>
-              <a:t>我手上有什么“原料”</a:t>
+              <a:t>我做了什么：通话复盘助手</a:t>
             </a:r>
           </a:p>
         </p:txBody>
@@ -4624,8 +4708,8 @@
         </p:nvSpPr>
         <p:spPr>
           <a:xfrm>
-            <a:off x="594360" y="1234440"/>
-            <a:ext cx="2011680" cy="38100"/>
+            <a:off x="594360" y="1097280"/>
+            <a:ext cx="1828800" cy="38100"/>
           </a:xfrm>
           <a:prstGeom prst="rect">
             <a:avLst/>
@@ -4667,8 +4751,8 @@
         </p:nvSpPr>
         <p:spPr>
           <a:xfrm>
-            <a:off x="731520" y="1554480"/>
-            <a:ext cx="10728655" cy="4389120"/>
+            <a:off x="731520" y="1371600"/>
+            <a:ext cx="10728655" cy="5029200"/>
           </a:xfrm>
           <a:prstGeom prst="rect">
             <a:avLst/>
@@ -4683,7 +4767,7 @@
           <a:p>
             <a:pPr>
               <a:spcAft>
-                <a:spcPts val="1000"/>
+                <a:spcPts val="800"/>
               </a:spcAft>
             </a:pPr>
             <a:r>
@@ -4693,13 +4777,13 @@
                 </a:solidFill>
                 <a:latin typeface="Microsoft YaHei"/>
               </a:rPr>
-              <a:t>•  CRM 销售记录  →  时间该花在谁身上？</a:t>
+              <a:t>• 用 Cursor 开发了一个网站，上传录音转写即可分析</a:t>
             </a:r>
           </a:p>
           <a:p>
             <a:pPr>
               <a:spcAft>
-                <a:spcPts val="1000"/>
+                <a:spcPts val="800"/>
               </a:spcAft>
             </a:pPr>
             <a:r>
@@ -4709,13 +4793,45 @@
                 </a:solidFill>
                 <a:latin typeface="Microsoft YaHei"/>
               </a:rPr>
-              <a:t>•  知识库网站  →  客户问的我答得准吗？</a:t>
+              <a:t>• 自动输出 10 个维度的复盘表：</a:t>
+            </a:r>
+          </a:p>
+          <a:p>
+            <a:pPr lvl="1">
+              <a:spcAft>
+                <a:spcPts val="800"/>
+              </a:spcAft>
+            </a:pPr>
+            <a:r>
+              <a:rPr sz="1700" b="0">
+                <a:solidFill>
+                  <a:srgbClr val="555F6B"/>
+                </a:solidFill>
+                <a:latin typeface="Microsoft YaHei"/>
+              </a:rPr>
+              <a:t>– 需求 / 预算 / 异议（含应对建议）/ 做得好的 / 待改进（含改法）</a:t>
+            </a:r>
+          </a:p>
+          <a:p>
+            <a:pPr lvl="1">
+              <a:spcAft>
+                <a:spcPts val="800"/>
+              </a:spcAft>
+            </a:pPr>
+            <a:r>
+              <a:rPr sz="1700" b="0">
+                <a:solidFill>
+                  <a:srgbClr val="555F6B"/>
+                </a:solidFill>
+                <a:latin typeface="Microsoft YaHei"/>
+              </a:rPr>
+              <a:t>– 遗漏动作 / 下一步 / 合规检查 / 金句 / 评分</a:t>
             </a:r>
           </a:p>
           <a:p>
             <a:pPr>
               <a:spcAft>
-                <a:spcPts val="1000"/>
+                <a:spcPts val="800"/>
               </a:spcAft>
             </a:pPr>
             <a:r>
@@ -4725,23 +4841,7 @@
                 </a:solidFill>
                 <a:latin typeface="Microsoft YaHei"/>
               </a:rPr>
-              <a:t>•  通话录音  →  我哪句话说错 / 说漏了？</a:t>
-            </a:r>
-          </a:p>
-          <a:p>
-            <a:pPr>
-              <a:spcAft>
-                <a:spcPts val="1000"/>
-              </a:spcAft>
-            </a:pPr>
-            <a:r>
-              <a:rPr sz="2200" b="1">
-                <a:solidFill>
-                  <a:srgbClr val="22292F"/>
-                </a:solidFill>
-                <a:latin typeface="Microsoft YaHei"/>
-              </a:rPr>
-              <a:t>•  把这三样和 AI 结合，做成了三个小工具</a:t>
+              <a:t>• 已部署上线，打开链接就能用，不用装软件</a:t>
             </a:r>
           </a:p>
         </p:txBody>
@@ -4772,8 +4872,8 @@
         </p:nvSpPr>
         <p:spPr>
           <a:xfrm>
-            <a:off x="548640" y="365760"/>
-            <a:ext cx="11094415" cy="914400"/>
+            <a:off x="548640" y="320040"/>
+            <a:ext cx="11094415" cy="822960"/>
           </a:xfrm>
           <a:prstGeom prst="rect">
             <a:avLst/>
@@ -4781,20 +4881,19 @@
           <a:noFill/>
         </p:spPr>
         <p:txBody>
-          <a:bodyPr wrap="square">
+          <a:bodyPr wrap="none">
             <a:spAutoFit/>
           </a:bodyPr>
           <a:lstStyle/>
           <a:p>
-            <a:pPr algn="l"/>
-            <a:r>
-              <a:rPr sz="3000" b="1">
+            <a:r>
+              <a:rPr sz="2800" b="1">
                 <a:solidFill>
                   <a:srgbClr val="1F4E79"/>
                 </a:solidFill>
                 <a:latin typeface="Microsoft YaHei"/>
               </a:rPr>
-              <a:t>我的 AI 学习路径</a:t>
+              <a:t>我的 AI 学习路径（用 Cursor）</a:t>
             </a:r>
           </a:p>
         </p:txBody>
@@ -4807,8 +4906,8 @@
         </p:nvSpPr>
         <p:spPr>
           <a:xfrm>
-            <a:off x="594360" y="1234440"/>
-            <a:ext cx="2011680" cy="38100"/>
+            <a:off x="594360" y="1097280"/>
+            <a:ext cx="1828800" cy="38100"/>
           </a:xfrm>
           <a:prstGeom prst="rect">
             <a:avLst/>
@@ -4850,8 +4949,8 @@
         </p:nvSpPr>
         <p:spPr>
           <a:xfrm>
-            <a:off x="731520" y="1554480"/>
-            <a:ext cx="10728655" cy="4389120"/>
+            <a:off x="731520" y="1371600"/>
+            <a:ext cx="10728655" cy="5029200"/>
           </a:xfrm>
           <a:prstGeom prst="rect">
             <a:avLst/>
@@ -4866,7 +4965,7 @@
           <a:p>
             <a:pPr>
               <a:spcAft>
-                <a:spcPts val="1000"/>
+                <a:spcPts val="800"/>
               </a:spcAft>
             </a:pPr>
             <a:r>
@@ -4876,13 +4975,13 @@
                 </a:solidFill>
                 <a:latin typeface="Microsoft YaHei"/>
               </a:rPr>
-              <a:t>•  学会用 Cursor 跑脚本，用大白话让 AI 帮我做工具</a:t>
+              <a:t>• 用 Cursor 把想法变成能用的工具（不需要会编程）</a:t>
             </a:r>
           </a:p>
           <a:p>
             <a:pPr>
               <a:spcAft>
-                <a:spcPts val="1000"/>
+                <a:spcPts val="800"/>
               </a:spcAft>
             </a:pPr>
             <a:r>
@@ -4892,13 +4991,13 @@
                 </a:solidFill>
                 <a:latin typeface="Microsoft YaHei"/>
               </a:rPr>
-              <a:t>•  理解了关键概念 RAG：让 AI 先查资料再回答，不瞎编</a:t>
+              <a:t>• 学会整理需求：复盘要哪些维度、输出什么格式</a:t>
             </a:r>
           </a:p>
           <a:p>
             <a:pPr>
               <a:spcAft>
-                <a:spcPts val="1000"/>
+                <a:spcPts val="800"/>
               </a:spcAft>
             </a:pPr>
             <a:r>
@@ -4908,7 +5007,7 @@
                 </a:solidFill>
                 <a:latin typeface="Microsoft YaHei"/>
               </a:rPr>
-              <a:t>•  学会写“好提问”（Prompt），结果质量差别巨大</a:t>
+              <a:t>• 部署成网站：免费平台一键上线，分享给同事</a:t>
             </a:r>
           </a:p>
         </p:txBody>
@@ -4939,8 +5038,8 @@
         </p:nvSpPr>
         <p:spPr>
           <a:xfrm>
-            <a:off x="548640" y="365760"/>
-            <a:ext cx="11094415" cy="914400"/>
+            <a:off x="548640" y="320040"/>
+            <a:ext cx="11094415" cy="822960"/>
           </a:xfrm>
           <a:prstGeom prst="rect">
             <a:avLst/>
@@ -4948,20 +5047,19 @@
           <a:noFill/>
         </p:spPr>
         <p:txBody>
-          <a:bodyPr wrap="square">
+          <a:bodyPr wrap="none">
             <a:spAutoFit/>
           </a:bodyPr>
           <a:lstStyle/>
           <a:p>
-            <a:pPr algn="l"/>
-            <a:r>
-              <a:rPr sz="3000" b="1">
+            <a:r>
+              <a:rPr sz="2800" b="1">
                 <a:solidFill>
                   <a:srgbClr val="1F4E79"/>
                 </a:solidFill>
                 <a:latin typeface="Microsoft YaHei"/>
               </a:rPr>
-              <a:t>成果一 · 通话复盘助手（现场演示）</a:t>
+              <a:t>怎么用 · 第 1 步：打开网站，上传文件</a:t>
             </a:r>
           </a:p>
         </p:txBody>
@@ -4974,8 +5072,8 @@
         </p:nvSpPr>
         <p:spPr>
           <a:xfrm>
-            <a:off x="594360" y="1234440"/>
-            <a:ext cx="2011680" cy="38100"/>
+            <a:off x="594360" y="1097280"/>
+            <a:ext cx="1828800" cy="38100"/>
           </a:xfrm>
           <a:prstGeom prst="rect">
             <a:avLst/>
@@ -5009,16 +5107,40 @@
           </a:p>
         </p:txBody>
       </p:sp>
-      <p:sp>
-        <p:nvSpPr>
-          <p:cNvPr id="4" name="TextBox 3"/>
+      <p:pic>
+        <p:nvPicPr>
+          <p:cNvPr id="4" name="Picture 3" descr="01_上传页面.png"/>
+          <p:cNvPicPr>
+            <a:picLocks noChangeAspect="1"/>
+          </p:cNvPicPr>
+          <p:nvPr/>
+        </p:nvPicPr>
+        <p:blipFill>
+          <a:blip r:embed="rId2"/>
+          <a:stretch>
+            <a:fillRect/>
+          </a:stretch>
+        </p:blipFill>
+        <p:spPr>
+          <a:xfrm>
+            <a:off x="1097280" y="1280160"/>
+            <a:ext cx="9601200" cy="5400675"/>
+          </a:xfrm>
+          <a:prstGeom prst="rect">
+            <a:avLst/>
+          </a:prstGeom>
+        </p:spPr>
+      </p:pic>
+      <p:sp>
+        <p:nvSpPr>
+          <p:cNvPr id="5" name="TextBox 4"/>
           <p:cNvSpPr txBox="1"/>
           <p:nvPr/>
         </p:nvSpPr>
         <p:spPr>
           <a:xfrm>
-            <a:off x="731520" y="1554480"/>
-            <a:ext cx="10728655" cy="4389120"/>
+            <a:off x="731520" y="5577840"/>
+            <a:ext cx="10728655" cy="548640"/>
           </a:xfrm>
           <a:prstGeom prst="rect">
             <a:avLst/>
@@ -5026,88 +5148,20 @@
           <a:noFill/>
         </p:spPr>
         <p:txBody>
-          <a:bodyPr wrap="square">
+          <a:bodyPr wrap="none">
             <a:spAutoFit/>
           </a:bodyPr>
           <a:lstStyle/>
           <a:p>
-            <a:pPr>
-              <a:spcAft>
-                <a:spcPts val="1000"/>
-              </a:spcAft>
-            </a:pPr>
-            <a:r>
-              <a:rPr sz="2200" b="1">
-                <a:solidFill>
-                  <a:srgbClr val="22292F"/>
-                </a:solidFill>
-                <a:latin typeface="Microsoft YaHei"/>
-              </a:rPr>
-              <a:t>•  把录音转写丢进去，2 秒生成复盘表</a:t>
-            </a:r>
-          </a:p>
-          <a:p>
-            <a:pPr lvl="1">
-              <a:spcAft>
-                <a:spcPts val="1000"/>
-              </a:spcAft>
-            </a:pPr>
-            <a:r>
-              <a:rPr sz="1800" b="0">
+            <a:pPr algn="ctr"/>
+            <a:r>
+              <a:rPr sz="1400">
                 <a:solidFill>
                   <a:srgbClr val="555F6B"/>
                 </a:solidFill>
                 <a:latin typeface="Microsoft YaHei"/>
               </a:rPr>
-              <a:t>–  自动提取：需求 / 预算 / 异议 / 下一步</a:t>
-            </a:r>
-          </a:p>
-          <a:p>
-            <a:pPr lvl="1">
-              <a:spcAft>
-                <a:spcPts val="1000"/>
-              </a:spcAft>
-            </a:pPr>
-            <a:r>
-              <a:rPr sz="1800" b="0">
-                <a:solidFill>
-                  <a:srgbClr val="555F6B"/>
-                </a:solidFill>
-                <a:latin typeface="Microsoft YaHei"/>
-              </a:rPr>
-              <a:t>–  话术诊断：哪里没接住、哪里该追问</a:t>
-            </a:r>
-          </a:p>
-          <a:p>
-            <a:pPr lvl="1">
-              <a:spcAft>
-                <a:spcPts val="1000"/>
-              </a:spcAft>
-            </a:pPr>
-            <a:r>
-              <a:rPr sz="1800" b="0">
-                <a:solidFill>
-                  <a:srgbClr val="555F6B"/>
-                </a:solidFill>
-                <a:latin typeface="Microsoft YaHei"/>
-              </a:rPr>
-              <a:t>–  合规检查 + 金句沉淀</a:t>
-            </a:r>
-          </a:p>
-          <a:p>
-            <a:pPr>
-              <a:spcAft>
-                <a:spcPts val="1000"/>
-              </a:spcAft>
-            </a:pPr>
-            <a:r>
-              <a:rPr sz="2200" b="1">
-                <a:solidFill>
-                  <a:srgbClr val="22292F"/>
-                </a:solidFill>
-                <a:latin typeface="Microsoft YaHei"/>
-              </a:rPr>
-              <a:t>•  复盘时间：20 分钟 → 2 分钟</a:t>
+              <a:t>打开你部署好的网址 → 拖入脱敏后的 Excel/CSV/txt → 点「开始分析」</a:t>
             </a:r>
           </a:p>
         </p:txBody>
@@ -5138,8 +5192,8 @@
         </p:nvSpPr>
         <p:spPr>
           <a:xfrm>
-            <a:off x="548640" y="365760"/>
-            <a:ext cx="11094415" cy="914400"/>
+            <a:off x="548640" y="320040"/>
+            <a:ext cx="11094415" cy="822960"/>
           </a:xfrm>
           <a:prstGeom prst="rect">
             <a:avLst/>
@@ -5147,20 +5201,19 @@
           <a:noFill/>
         </p:spPr>
         <p:txBody>
-          <a:bodyPr wrap="square">
+          <a:bodyPr wrap="none">
             <a:spAutoFit/>
           </a:bodyPr>
           <a:lstStyle/>
           <a:p>
-            <a:pPr algn="l"/>
-            <a:r>
-              <a:rPr sz="3000" b="1">
+            <a:r>
+              <a:rPr sz="2800" b="1">
                 <a:solidFill>
                   <a:srgbClr val="1F4E79"/>
                 </a:solidFill>
                 <a:latin typeface="Microsoft YaHei"/>
               </a:rPr>
-              <a:t>成果二 · 客户话术生成器</a:t>
+              <a:t>怎么用 · 第 2 步：查看复盘结果</a:t>
             </a:r>
           </a:p>
         </p:txBody>
@@ -5173,8 +5226,8 @@
         </p:nvSpPr>
         <p:spPr>
           <a:xfrm>
-            <a:off x="594360" y="1234440"/>
-            <a:ext cx="2011680" cy="38100"/>
+            <a:off x="594360" y="1097280"/>
+            <a:ext cx="1828800" cy="38100"/>
           </a:xfrm>
           <a:prstGeom prst="rect">
             <a:avLst/>
@@ -5208,16 +5261,40 @@
           </a:p>
         </p:txBody>
       </p:sp>
-      <p:sp>
-        <p:nvSpPr>
-          <p:cNvPr id="4" name="TextBox 3"/>
+      <p:pic>
+        <p:nvPicPr>
+          <p:cNvPr id="4" name="Picture 3" descr="02_分析结果.png"/>
+          <p:cNvPicPr>
+            <a:picLocks noChangeAspect="1"/>
+          </p:cNvPicPr>
+          <p:nvPr/>
+        </p:nvPicPr>
+        <p:blipFill>
+          <a:blip r:embed="rId2"/>
+          <a:stretch>
+            <a:fillRect/>
+          </a:stretch>
+        </p:blipFill>
+        <p:spPr>
+          <a:xfrm>
+            <a:off x="1097280" y="1280160"/>
+            <a:ext cx="9601200" cy="5400675"/>
+          </a:xfrm>
+          <a:prstGeom prst="rect">
+            <a:avLst/>
+          </a:prstGeom>
+        </p:spPr>
+      </p:pic>
+      <p:sp>
+        <p:nvSpPr>
+          <p:cNvPr id="5" name="TextBox 4"/>
           <p:cNvSpPr txBox="1"/>
           <p:nvPr/>
         </p:nvSpPr>
         <p:spPr>
           <a:xfrm>
-            <a:off x="731520" y="1554480"/>
-            <a:ext cx="10728655" cy="4389120"/>
+            <a:off x="731520" y="5577840"/>
+            <a:ext cx="10728655" cy="548640"/>
           </a:xfrm>
           <a:prstGeom prst="rect">
             <a:avLst/>
@@ -5225,72 +5302,20 @@
           <a:noFill/>
         </p:spPr>
         <p:txBody>
-          <a:bodyPr wrap="square">
+          <a:bodyPr wrap="none">
             <a:spAutoFit/>
           </a:bodyPr>
           <a:lstStyle/>
           <a:p>
-            <a:pPr>
-              <a:spcAft>
-                <a:spcPts val="1000"/>
-              </a:spcAft>
-            </a:pPr>
-            <a:r>
-              <a:rPr sz="2200" b="1">
-                <a:solidFill>
-                  <a:srgbClr val="22292F"/>
-                </a:solidFill>
-                <a:latin typeface="Microsoft YaHei"/>
-              </a:rPr>
-              <a:t>•  输入客户画像，输出整通电话的话术</a:t>
-            </a:r>
-          </a:p>
-          <a:p>
-            <a:pPr lvl="1">
-              <a:spcAft>
-                <a:spcPts val="1000"/>
-              </a:spcAft>
-            </a:pPr>
-            <a:r>
-              <a:rPr sz="1800" b="0">
+            <a:pPr algn="ctr"/>
+            <a:r>
+              <a:rPr sz="1400">
                 <a:solidFill>
                   <a:srgbClr val="555F6B"/>
                 </a:solidFill>
                 <a:latin typeface="Microsoft YaHei"/>
               </a:rPr>
-              <a:t>–  开场白 / 核心卖点 / 异议应对</a:t>
-            </a:r>
-          </a:p>
-          <a:p>
-            <a:pPr lvl="1">
-              <a:spcAft>
-                <a:spcPts val="1000"/>
-              </a:spcAft>
-            </a:pPr>
-            <a:r>
-              <a:rPr sz="1800" b="0">
-                <a:solidFill>
-                  <a:srgbClr val="555F6B"/>
-                </a:solidFill>
-                <a:latin typeface="Microsoft YaHei"/>
-              </a:rPr>
-              <a:t>–  该问的关键问题 + 跟进文案</a:t>
-            </a:r>
-          </a:p>
-          <a:p>
-            <a:pPr>
-              <a:spcAft>
-                <a:spcPts val="1000"/>
-              </a:spcAft>
-            </a:pPr>
-            <a:r>
-              <a:rPr sz="2200" b="1">
-                <a:solidFill>
-                  <a:srgbClr val="22292F"/>
-                </a:solidFill>
-                <a:latin typeface="Microsoft YaHei"/>
-              </a:rPr>
-              <a:t>•  打电话前准备：翻半天 → 1 分钟</a:t>
+              <a:t>几秒后自动生成结构化复盘，可下载 Markdown 保存</a:t>
             </a:r>
           </a:p>
         </p:txBody>
@@ -5321,8 +5346,8 @@
         </p:nvSpPr>
         <p:spPr>
           <a:xfrm>
-            <a:off x="548640" y="365760"/>
-            <a:ext cx="11094415" cy="914400"/>
+            <a:off x="548640" y="320040"/>
+            <a:ext cx="11094415" cy="822960"/>
           </a:xfrm>
           <a:prstGeom prst="rect">
             <a:avLst/>
@@ -5330,20 +5355,19 @@
           <a:noFill/>
         </p:spPr>
         <p:txBody>
-          <a:bodyPr wrap="square">
+          <a:bodyPr wrap="none">
             <a:spAutoFit/>
           </a:bodyPr>
           <a:lstStyle/>
           <a:p>
-            <a:pPr algn="l"/>
-            <a:r>
-              <a:rPr sz="3000" b="1">
+            <a:r>
+              <a:rPr sz="2800" b="1">
                 <a:solidFill>
                   <a:srgbClr val="1F4E79"/>
                 </a:solidFill>
                 <a:latin typeface="Microsoft YaHei"/>
               </a:rPr>
-              <a:t>成果三 · 知识库即问即答（RAG）</a:t>
+              <a:t>分析结果示例（真实输出节选）</a:t>
             </a:r>
           </a:p>
         </p:txBody>
@@ -5356,8 +5380,8 @@
         </p:nvSpPr>
         <p:spPr>
           <a:xfrm>
-            <a:off x="594360" y="1234440"/>
-            <a:ext cx="2011680" cy="38100"/>
+            <a:off x="594360" y="1097280"/>
+            <a:ext cx="1828800" cy="38100"/>
           </a:xfrm>
           <a:prstGeom prst="rect">
             <a:avLst/>
@@ -5393,14 +5417,57 @@
       </p:sp>
       <p:sp>
         <p:nvSpPr>
-          <p:cNvPr id="4" name="TextBox 3"/>
+          <p:cNvPr id="4" name="Rectangle 3"/>
+          <p:cNvSpPr/>
+          <p:nvPr/>
+        </p:nvSpPr>
+        <p:spPr>
+          <a:xfrm>
+            <a:off x="731520" y="1371600"/>
+            <a:ext cx="10728655" cy="1051560"/>
+          </a:xfrm>
+          <a:prstGeom prst="rect">
+            <a:avLst/>
+          </a:prstGeom>
+          <a:solidFill>
+            <a:srgbClr val="FFF8E1"/>
+          </a:solidFill>
+          <a:ln>
+            <a:noFill/>
+          </a:ln>
+        </p:spPr>
+        <p:style>
+          <a:lnRef idx="1">
+            <a:schemeClr val="accent1"/>
+          </a:lnRef>
+          <a:fillRef idx="3">
+            <a:schemeClr val="accent1"/>
+          </a:fillRef>
+          <a:effectRef idx="2">
+            <a:schemeClr val="accent1"/>
+          </a:effectRef>
+          <a:fontRef idx="minor">
+            <a:schemeClr val="lt1"/>
+          </a:fontRef>
+        </p:style>
+        <p:txBody>
+          <a:bodyPr rtlCol="0" anchor="ctr"/>
+          <a:lstStyle/>
+          <a:p>
+            <a:pPr algn="ctr"/>
+          </a:p>
+        </p:txBody>
+      </p:sp>
+      <p:sp>
+        <p:nvSpPr>
+          <p:cNvPr id="5" name="TextBox 4"/>
           <p:cNvSpPr txBox="1"/>
           <p:nvPr/>
         </p:nvSpPr>
         <p:spPr>
           <a:xfrm>
-            <a:off x="731520" y="1554480"/>
-            <a:ext cx="10728655" cy="4389120"/>
+            <a:off x="914400" y="1463040"/>
+            <a:ext cx="10362895" cy="914400"/>
           </a:xfrm>
           <a:prstGeom prst="rect">
             <a:avLst/>
@@ -5408,56 +5475,294 @@
           <a:noFill/>
         </p:spPr>
         <p:txBody>
-          <a:bodyPr wrap="square">
+          <a:bodyPr wrap="none">
             <a:spAutoFit/>
           </a:bodyPr>
           <a:lstStyle/>
           <a:p>
-            <a:pPr>
-              <a:spcAft>
-                <a:spcPts val="1000"/>
-              </a:spcAft>
-            </a:pPr>
-            <a:r>
-              <a:rPr sz="2200" b="1">
+            <a:r>
+              <a:rPr b="1" sz="1500">
+                <a:solidFill>
+                  <a:srgbClr val="1F4E79"/>
+                </a:solidFill>
+                <a:latin typeface="Microsoft YaHei"/>
+              </a:rPr>
+              <a:t>客户异议</a:t>
+            </a:r>
+          </a:p>
+          <a:p>
+            <a:r>
+              <a:rPr sz="1300">
                 <a:solidFill>
                   <a:srgbClr val="22292F"/>
                 </a:solidFill>
                 <a:latin typeface="Microsoft YaHei"/>
               </a:rPr>
-              <a:t>•  用大白话问，AI 带着出处回答</a:t>
-            </a:r>
-          </a:p>
-          <a:p>
-            <a:pPr>
-              <a:spcAft>
-                <a:spcPts val="1000"/>
-              </a:spcAft>
-            </a:pPr>
-            <a:r>
-              <a:rPr sz="2200" b="1">
+              <a:t>【切换风险】客户原话：「切换影响营业」→ 建议：先 1 家店试点，老店照常开单</a:t>
+            </a:r>
+          </a:p>
+        </p:txBody>
+      </p:sp>
+      <p:sp>
+        <p:nvSpPr>
+          <p:cNvPr id="6" name="Rectangle 5"/>
+          <p:cNvSpPr/>
+          <p:nvPr/>
+        </p:nvSpPr>
+        <p:spPr>
+          <a:xfrm>
+            <a:off x="731520" y="2514600"/>
+            <a:ext cx="10728655" cy="1051560"/>
+          </a:xfrm>
+          <a:prstGeom prst="rect">
+            <a:avLst/>
+          </a:prstGeom>
+          <a:solidFill>
+            <a:srgbClr val="FFF4F4"/>
+          </a:solidFill>
+          <a:ln>
+            <a:noFill/>
+          </a:ln>
+        </p:spPr>
+        <p:style>
+          <a:lnRef idx="1">
+            <a:schemeClr val="accent1"/>
+          </a:lnRef>
+          <a:fillRef idx="3">
+            <a:schemeClr val="accent1"/>
+          </a:fillRef>
+          <a:effectRef idx="2">
+            <a:schemeClr val="accent1"/>
+          </a:effectRef>
+          <a:fontRef idx="minor">
+            <a:schemeClr val="lt1"/>
+          </a:fontRef>
+        </p:style>
+        <p:txBody>
+          <a:bodyPr rtlCol="0" anchor="ctr"/>
+          <a:lstStyle/>
+          <a:p>
+            <a:pPr algn="ctr"/>
+          </a:p>
+        </p:txBody>
+      </p:sp>
+      <p:sp>
+        <p:nvSpPr>
+          <p:cNvPr id="7" name="TextBox 6"/>
+          <p:cNvSpPr txBox="1"/>
+          <p:nvPr/>
+        </p:nvSpPr>
+        <p:spPr>
+          <a:xfrm>
+            <a:off x="914400" y="2606040"/>
+            <a:ext cx="10362895" cy="914400"/>
+          </a:xfrm>
+          <a:prstGeom prst="rect">
+            <a:avLst/>
+          </a:prstGeom>
+          <a:noFill/>
+        </p:spPr>
+        <p:txBody>
+          <a:bodyPr wrap="none">
+            <a:spAutoFit/>
+          </a:bodyPr>
+          <a:lstStyle/>
+          <a:p>
+            <a:r>
+              <a:rPr b="1" sz="1500">
+                <a:solidFill>
+                  <a:srgbClr val="1F4E79"/>
+                </a:solidFill>
+                <a:latin typeface="Microsoft YaHei"/>
+              </a:rPr>
+              <a:t>待改进</a:t>
+            </a:r>
+          </a:p>
+          <a:p>
+            <a:r>
+              <a:rPr sz="1300">
                 <a:solidFill>
                   <a:srgbClr val="22292F"/>
                 </a:solidFill>
                 <a:latin typeface="Microsoft YaHei"/>
               </a:rPr>
-              <a:t>•  只答知识库里有的，查不到就说“建议核实”</a:t>
-            </a:r>
-          </a:p>
-          <a:p>
-            <a:pPr>
-              <a:spcAft>
-                <a:spcPts val="1000"/>
-              </a:spcAft>
-            </a:pPr>
-            <a:r>
-              <a:rPr sz="2200" b="1">
+              <a:t>❌「保证三天上线」→ 改为「通常 3-5 个工作日，视门店数量而定」</a:t>
+            </a:r>
+          </a:p>
+        </p:txBody>
+      </p:sp>
+      <p:sp>
+        <p:nvSpPr>
+          <p:cNvPr id="8" name="Rectangle 7"/>
+          <p:cNvSpPr/>
+          <p:nvPr/>
+        </p:nvSpPr>
+        <p:spPr>
+          <a:xfrm>
+            <a:off x="731520" y="3657600"/>
+            <a:ext cx="10728655" cy="1051560"/>
+          </a:xfrm>
+          <a:prstGeom prst="rect">
+            <a:avLst/>
+          </a:prstGeom>
+          <a:solidFill>
+            <a:srgbClr val="FFF8E1"/>
+          </a:solidFill>
+          <a:ln>
+            <a:noFill/>
+          </a:ln>
+        </p:spPr>
+        <p:style>
+          <a:lnRef idx="1">
+            <a:schemeClr val="accent1"/>
+          </a:lnRef>
+          <a:fillRef idx="3">
+            <a:schemeClr val="accent1"/>
+          </a:fillRef>
+          <a:effectRef idx="2">
+            <a:schemeClr val="accent1"/>
+          </a:effectRef>
+          <a:fontRef idx="minor">
+            <a:schemeClr val="lt1"/>
+          </a:fontRef>
+        </p:style>
+        <p:txBody>
+          <a:bodyPr rtlCol="0" anchor="ctr"/>
+          <a:lstStyle/>
+          <a:p>
+            <a:pPr algn="ctr"/>
+          </a:p>
+        </p:txBody>
+      </p:sp>
+      <p:sp>
+        <p:nvSpPr>
+          <p:cNvPr id="9" name="TextBox 8"/>
+          <p:cNvSpPr txBox="1"/>
+          <p:nvPr/>
+        </p:nvSpPr>
+        <p:spPr>
+          <a:xfrm>
+            <a:off x="914400" y="3749040"/>
+            <a:ext cx="10362895" cy="914400"/>
+          </a:xfrm>
+          <a:prstGeom prst="rect">
+            <a:avLst/>
+          </a:prstGeom>
+          <a:noFill/>
+        </p:spPr>
+        <p:txBody>
+          <a:bodyPr wrap="none">
+            <a:spAutoFit/>
+          </a:bodyPr>
+          <a:lstStyle/>
+          <a:p>
+            <a:r>
+              <a:rPr b="1" sz="1500">
+                <a:solidFill>
+                  <a:srgbClr val="1F4E79"/>
+                </a:solidFill>
+                <a:latin typeface="Microsoft YaHei"/>
+              </a:rPr>
+              <a:t>合规检查</a:t>
+            </a:r>
+          </a:p>
+          <a:p>
+            <a:r>
+              <a:rPr sz="1300">
                 <a:solidFill>
                   <a:srgbClr val="22292F"/>
                 </a:solidFill>
                 <a:latin typeface="Microsoft YaHei"/>
               </a:rPr>
-              <a:t>•  不用再连 VPN 翻文档</a:t>
+              <a:t>⚠️ 过度承诺风险：避免绝对化表述</a:t>
+            </a:r>
+          </a:p>
+        </p:txBody>
+      </p:sp>
+      <p:sp>
+        <p:nvSpPr>
+          <p:cNvPr id="10" name="Rectangle 9"/>
+          <p:cNvSpPr/>
+          <p:nvPr/>
+        </p:nvSpPr>
+        <p:spPr>
+          <a:xfrm>
+            <a:off x="731520" y="4800600"/>
+            <a:ext cx="10728655" cy="1051560"/>
+          </a:xfrm>
+          <a:prstGeom prst="rect">
+            <a:avLst/>
+          </a:prstGeom>
+          <a:solidFill>
+            <a:srgbClr val="E8F3FC"/>
+          </a:solidFill>
+          <a:ln>
+            <a:noFill/>
+          </a:ln>
+        </p:spPr>
+        <p:style>
+          <a:lnRef idx="1">
+            <a:schemeClr val="accent1"/>
+          </a:lnRef>
+          <a:fillRef idx="3">
+            <a:schemeClr val="accent1"/>
+          </a:fillRef>
+          <a:effectRef idx="2">
+            <a:schemeClr val="accent1"/>
+          </a:effectRef>
+          <a:fontRef idx="minor">
+            <a:schemeClr val="lt1"/>
+          </a:fontRef>
+        </p:style>
+        <p:txBody>
+          <a:bodyPr rtlCol="0" anchor="ctr"/>
+          <a:lstStyle/>
+          <a:p>
+            <a:pPr algn="ctr"/>
+          </a:p>
+        </p:txBody>
+      </p:sp>
+      <p:sp>
+        <p:nvSpPr>
+          <p:cNvPr id="11" name="TextBox 10"/>
+          <p:cNvSpPr txBox="1"/>
+          <p:nvPr/>
+        </p:nvSpPr>
+        <p:spPr>
+          <a:xfrm>
+            <a:off x="914400" y="4892040"/>
+            <a:ext cx="10362895" cy="914400"/>
+          </a:xfrm>
+          <a:prstGeom prst="rect">
+            <a:avLst/>
+          </a:prstGeom>
+          <a:noFill/>
+        </p:spPr>
+        <p:txBody>
+          <a:bodyPr wrap="none">
+            <a:spAutoFit/>
+          </a:bodyPr>
+          <a:lstStyle/>
+          <a:p>
+            <a:r>
+              <a:rPr b="1" sz="1500">
+                <a:solidFill>
+                  <a:srgbClr val="1F4E79"/>
+                </a:solidFill>
+                <a:latin typeface="Microsoft YaHei"/>
+              </a:rPr>
+              <a:t>下一步</a:t>
+            </a:r>
+          </a:p>
+          <a:p>
+            <a:r>
+              <a:rPr sz="1300">
+                <a:solidFill>
+                  <a:srgbClr val="22292F"/>
+                </a:solidFill>
+                <a:latin typeface="Microsoft YaHei"/>
+              </a:rPr>
+              <a:t>48h 内发《平滑切换方案》+ 约下次 15 分钟演示</a:t>
             </a:r>
           </a:p>
         </p:txBody>
@@ -5488,8 +5793,8 @@
         </p:nvSpPr>
         <p:spPr>
           <a:xfrm>
-            <a:off x="548640" y="365760"/>
-            <a:ext cx="11094415" cy="914400"/>
+            <a:off x="548640" y="320040"/>
+            <a:ext cx="11094415" cy="822960"/>
           </a:xfrm>
           <a:prstGeom prst="rect">
             <a:avLst/>
@@ -5497,20 +5802,19 @@
           <a:noFill/>
         </p:spPr>
         <p:txBody>
-          <a:bodyPr wrap="square">
+          <a:bodyPr wrap="none">
             <a:spAutoFit/>
           </a:bodyPr>
           <a:lstStyle/>
           <a:p>
-            <a:pPr algn="l"/>
-            <a:r>
-              <a:rPr sz="3000" b="1">
+            <a:r>
+              <a:rPr sz="2800" b="1">
                 <a:solidFill>
                   <a:srgbClr val="1F4E79"/>
                 </a:solidFill>
                 <a:latin typeface="Microsoft YaHei"/>
               </a:rPr>
-              <a:t>量化成果（估算）</a:t>
+              <a:t>效果对比</a:t>
             </a:r>
           </a:p>
         </p:txBody>
@@ -5523,8 +5827,8 @@
         </p:nvSpPr>
         <p:spPr>
           <a:xfrm>
-            <a:off x="594360" y="1234440"/>
-            <a:ext cx="2011680" cy="38100"/>
+            <a:off x="594360" y="1097280"/>
+            <a:ext cx="1828800" cy="38100"/>
           </a:xfrm>
           <a:prstGeom prst="rect">
             <a:avLst/>
@@ -5566,8 +5870,8 @@
         </p:nvSpPr>
         <p:spPr>
           <a:xfrm>
-            <a:off x="731520" y="1554480"/>
-            <a:ext cx="10728655" cy="4389120"/>
+            <a:off x="731520" y="1371600"/>
+            <a:ext cx="10728655" cy="5029200"/>
           </a:xfrm>
           <a:prstGeom prst="rect">
             <a:avLst/>
@@ -5582,7 +5886,7 @@
           <a:p>
             <a:pPr>
               <a:spcAft>
-                <a:spcPts val="1000"/>
+                <a:spcPts val="800"/>
               </a:spcAft>
             </a:pPr>
             <a:r>
@@ -5592,13 +5896,13 @@
                 </a:solidFill>
                 <a:latin typeface="Microsoft YaHei"/>
               </a:rPr>
-              <a:t>•  单通电话复盘：20 分钟 → 2 分钟</a:t>
+              <a:t>• 复盘时间：20 分钟 → 2 分钟</a:t>
             </a:r>
           </a:p>
           <a:p>
             <a:pPr>
               <a:spcAft>
-                <a:spcPts val="1000"/>
+                <a:spcPts val="800"/>
               </a:spcAft>
             </a:pPr>
             <a:r>
@@ -5608,13 +5912,13 @@
                 </a:solidFill>
                 <a:latin typeface="Microsoft YaHei"/>
               </a:rPr>
-              <a:t>•  单个客户话术准备：15 分钟 → 1 分钟</a:t>
+              <a:t>• 自动发现过度承诺（如「保证三天上线」）</a:t>
             </a:r>
           </a:p>
           <a:p>
             <a:pPr>
               <a:spcAft>
-                <a:spcPts val="1000"/>
+                <a:spcPts val="800"/>
               </a:spcAft>
             </a:pPr>
             <a:r>
@@ -5624,13 +5928,13 @@
                 </a:solidFill>
                 <a:latin typeface="Microsoft YaHei"/>
               </a:rPr>
-              <a:t>•  知识库查询：5 分钟 → 30 秒</a:t>
+              <a:t>• 异议逐条分类 + 给出建议应对话术</a:t>
             </a:r>
           </a:p>
           <a:p>
             <a:pPr>
               <a:spcAft>
-                <a:spcPts val="1000"/>
+                <a:spcPts val="800"/>
               </a:spcAft>
             </a:pPr>
             <a:r>
@@ -5640,7 +5944,7 @@
                 </a:solidFill>
                 <a:latin typeface="Microsoft YaHei"/>
               </a:rPr>
-              <a:t>•  省下的时间 = 每天多打 N 通有效电话</a:t>
+              <a:t>• 可复用金句自动沉淀，团队共享</a:t>
             </a:r>
           </a:p>
         </p:txBody>
@@ -5671,8 +5975,8 @@
         </p:nvSpPr>
         <p:spPr>
           <a:xfrm>
-            <a:off x="548640" y="365760"/>
-            <a:ext cx="11094415" cy="914400"/>
+            <a:off x="548640" y="320040"/>
+            <a:ext cx="11094415" cy="822960"/>
           </a:xfrm>
           <a:prstGeom prst="rect">
             <a:avLst/>
@@ -5680,20 +5984,19 @@
           <a:noFill/>
         </p:spPr>
         <p:txBody>
-          <a:bodyPr wrap="square">
+          <a:bodyPr wrap="none">
             <a:spAutoFit/>
           </a:bodyPr>
           <a:lstStyle/>
           <a:p>
-            <a:pPr algn="l"/>
-            <a:r>
-              <a:rPr sz="3000" b="1">
+            <a:r>
+              <a:rPr sz="2800" b="1">
                 <a:solidFill>
                   <a:srgbClr val="1F4E79"/>
                 </a:solidFill>
                 <a:latin typeface="Microsoft YaHei"/>
               </a:rPr>
-              <a:t>数据安全红线（重点）</a:t>
+              <a:t>数据安全（分享必讲）</a:t>
             </a:r>
           </a:p>
         </p:txBody>
@@ -5706,8 +6009,8 @@
         </p:nvSpPr>
         <p:spPr>
           <a:xfrm>
-            <a:off x="594360" y="1234440"/>
-            <a:ext cx="2011680" cy="38100"/>
+            <a:off x="594360" y="1097280"/>
+            <a:ext cx="1828800" cy="38100"/>
           </a:xfrm>
           <a:prstGeom prst="rect">
             <a:avLst/>
@@ -5749,8 +6052,8 @@
         </p:nvSpPr>
         <p:spPr>
           <a:xfrm>
-            <a:off x="731520" y="1554480"/>
-            <a:ext cx="10728655" cy="4389120"/>
+            <a:off x="731520" y="1371600"/>
+            <a:ext cx="10728655" cy="5029200"/>
           </a:xfrm>
           <a:prstGeom prst="rect">
             <a:avLst/>
@@ -5765,7 +6068,7 @@
           <a:p>
             <a:pPr>
               <a:spcAft>
-                <a:spcPts val="1000"/>
+                <a:spcPts val="800"/>
               </a:spcAft>
             </a:pPr>
             <a:r>
@@ -5775,13 +6078,13 @@
                 </a:solidFill>
                 <a:latin typeface="Microsoft YaHei"/>
               </a:rPr>
-              <a:t>•  客户信息、录音、知识库 → 先脱敏再用</a:t>
+              <a:t>• 上传前必须脱敏：去掉真实姓名、电话、公司名</a:t>
             </a:r>
           </a:p>
           <a:p>
             <a:pPr>
               <a:spcAft>
-                <a:spcPts val="1000"/>
+                <a:spcPts val="800"/>
               </a:spcAft>
             </a:pPr>
             <a:r>
@@ -5791,13 +6094,13 @@
                 </a:solidFill>
                 <a:latin typeface="Microsoft YaHei"/>
               </a:rPr>
-              <a:t>•  优先用公司批准的工具和接口</a:t>
+              <a:t>• 公开链接只传脱敏后的演示数据</a:t>
             </a:r>
           </a:p>
           <a:p>
             <a:pPr>
               <a:spcAft>
-                <a:spcPts val="1000"/>
+                <a:spcPts val="800"/>
               </a:spcAft>
             </a:pPr>
             <a:r>
@@ -5807,7 +6110,7 @@
                 </a:solidFill>
                 <a:latin typeface="Microsoft YaHei"/>
               </a:rPr>
-              <a:t>•  不把真实客户数据传到公网</a:t>
+              <a:t>• 真实录音只在公司允许的环境使用</a:t>
             </a:r>
           </a:p>
         </p:txBody>
